--- a/presentation/Презентация_ВКР_Тропа.pptx
+++ b/presentation/Презентация_ВКР_Тропа.pptx
@@ -3120,8 +3120,8 @@
         </p:nvSpPr>
         <p:spPr>
           <a:xfrm>
-            <a:off x="502920" y="292608"/>
-            <a:ext cx="7315200" cy="365760"/>
+            <a:off x="5287975" y="310896"/>
+            <a:ext cx="6400800" cy="457200"/>
           </a:xfrm>
           <a:prstGeom prst="rect">
             <a:avLst/>
@@ -3134,7 +3134,7 @@
           </a:bodyPr>
           <a:lstStyle/>
           <a:p>
-            <a:pPr algn="l">
+            <a:pPr algn="r">
               <a:lnSpc>
                 <a:spcPct val="100000"/>
               </a:lnSpc>
@@ -3146,59 +3146,13 @@
               </a:spcAft>
             </a:pPr>
             <a:r>
-              <a:rPr sz="1050" b="1" i="0" spc="220">
+              <a:rPr sz="1500" b="1" i="0" spc="180">
                 <a:solidFill>
                   <a:srgbClr val="8C8984"/>
                 </a:solidFill>
                 <a:latin typeface="Arial"/>
                 <a:cs typeface="Arial"/>
               </a:rPr>
-              <a:t>БАКАЛАВРСКАЯ РАБОТА</a:t>
-            </a:r>
-          </a:p>
-        </p:txBody>
-      </p:sp>
-      <p:sp>
-        <p:nvSpPr>
-          <p:cNvPr id="3" name="TextBox 2"/>
-          <p:cNvSpPr txBox="1"/>
-          <p:nvPr/>
-        </p:nvSpPr>
-        <p:spPr>
-          <a:xfrm>
-            <a:off x="6202375" y="292608"/>
-            <a:ext cx="5486400" cy="365760"/>
-          </a:xfrm>
-          <a:prstGeom prst="rect">
-            <a:avLst/>
-          </a:prstGeom>
-          <a:noFill/>
-        </p:spPr>
-        <p:txBody>
-          <a:bodyPr wrap="square" lIns="0" rIns="0" tIns="0" bIns="0">
-            <a:noAutofit/>
-          </a:bodyPr>
-          <a:lstStyle/>
-          <a:p>
-            <a:pPr algn="r">
-              <a:lnSpc>
-                <a:spcPct val="100000"/>
-              </a:lnSpc>
-              <a:spcBef>
-                <a:spcPts val="0"/>
-              </a:spcBef>
-              <a:spcAft>
-                <a:spcPts val="0"/>
-              </a:spcAft>
-            </a:pPr>
-            <a:r>
-              <a:rPr sz="1050" b="1" i="0" spc="220">
-                <a:solidFill>
-                  <a:srgbClr val="8C8984"/>
-                </a:solidFill>
-                <a:latin typeface="Arial"/>
-                <a:cs typeface="Arial"/>
-              </a:rPr>
               <a:t>ТУЛГУ · ТУЛА, 2026</a:t>
             </a:r>
           </a:p>
@@ -3206,7 +3160,7 @@
       </p:sp>
       <p:sp>
         <p:nvSpPr>
-          <p:cNvPr id="4" name="Rectangle 3"/>
+          <p:cNvPr id="3" name="Rectangle 2"/>
           <p:cNvSpPr/>
           <p:nvPr/>
         </p:nvSpPr>
@@ -3250,7 +3204,7 @@
       </p:sp>
       <p:sp>
         <p:nvSpPr>
-          <p:cNvPr id="5" name="TextBox 4"/>
+          <p:cNvPr id="4" name="TextBox 3"/>
           <p:cNvSpPr txBox="1"/>
           <p:nvPr/>
         </p:nvSpPr>
@@ -3296,7 +3250,7 @@
       </p:sp>
       <p:sp>
         <p:nvSpPr>
-          <p:cNvPr id="6" name="TextBox 5"/>
+          <p:cNvPr id="5" name="TextBox 4"/>
           <p:cNvSpPr txBox="1"/>
           <p:nvPr/>
         </p:nvSpPr>
@@ -3342,7 +3296,7 @@
       </p:sp>
       <p:sp>
         <p:nvSpPr>
-          <p:cNvPr id="7" name="TextBox 6"/>
+          <p:cNvPr id="6" name="TextBox 5"/>
           <p:cNvSpPr txBox="1"/>
           <p:nvPr/>
         </p:nvSpPr>
@@ -3388,7 +3342,7 @@
       </p:sp>
       <p:sp>
         <p:nvSpPr>
-          <p:cNvPr id="8" name="Rectangle 7"/>
+          <p:cNvPr id="7" name="Rectangle 6"/>
           <p:cNvSpPr/>
           <p:nvPr/>
         </p:nvSpPr>
@@ -3432,7 +3386,7 @@
       </p:sp>
       <p:sp>
         <p:nvSpPr>
-          <p:cNvPr id="9" name="TextBox 8"/>
+          <p:cNvPr id="8" name="TextBox 7"/>
           <p:cNvSpPr txBox="1"/>
           <p:nvPr/>
         </p:nvSpPr>
@@ -3521,7 +3475,7 @@
       </p:sp>
       <p:sp>
         <p:nvSpPr>
-          <p:cNvPr id="10" name="TextBox 9"/>
+          <p:cNvPr id="9" name="TextBox 8"/>
           <p:cNvSpPr txBox="1"/>
           <p:nvPr/>
         </p:nvSpPr>
@@ -3599,8 +3553,8 @@
         </p:nvSpPr>
         <p:spPr>
           <a:xfrm>
-            <a:off x="502920" y="292608"/>
-            <a:ext cx="7315200" cy="365760"/>
+            <a:off x="5287975" y="310896"/>
+            <a:ext cx="6400800" cy="457200"/>
           </a:xfrm>
           <a:prstGeom prst="rect">
             <a:avLst/>
@@ -3613,7 +3567,7 @@
           </a:bodyPr>
           <a:lstStyle/>
           <a:p>
-            <a:pPr algn="l">
+            <a:pPr algn="r">
               <a:lnSpc>
                 <a:spcPct val="100000"/>
               </a:lnSpc>
@@ -3625,14 +3579,14 @@
               </a:spcAft>
             </a:pPr>
             <a:r>
-              <a:rPr sz="1050" b="1" i="0" spc="220">
+              <a:rPr sz="1500" b="1" i="0" spc="180">
                 <a:solidFill>
                   <a:srgbClr val="8C8984"/>
                 </a:solidFill>
                 <a:latin typeface="Arial"/>
                 <a:cs typeface="Arial"/>
               </a:rPr>
-              <a:t>ИС «ТРОПА» · ЗАЩИТА ВКР</a:t>
+              <a:t>ФИНАНСЫ</a:t>
             </a:r>
           </a:p>
         </p:txBody>
@@ -3640,52 +3594,6 @@
       <p:sp>
         <p:nvSpPr>
           <p:cNvPr id="3" name="TextBox 2"/>
-          <p:cNvSpPr txBox="1"/>
-          <p:nvPr/>
-        </p:nvSpPr>
-        <p:spPr>
-          <a:xfrm>
-            <a:off x="6202375" y="292608"/>
-            <a:ext cx="5486400" cy="365760"/>
-          </a:xfrm>
-          <a:prstGeom prst="rect">
-            <a:avLst/>
-          </a:prstGeom>
-          <a:noFill/>
-        </p:spPr>
-        <p:txBody>
-          <a:bodyPr wrap="square" lIns="0" rIns="0" tIns="0" bIns="0">
-            <a:noAutofit/>
-          </a:bodyPr>
-          <a:lstStyle/>
-          <a:p>
-            <a:pPr algn="r">
-              <a:lnSpc>
-                <a:spcPct val="100000"/>
-              </a:lnSpc>
-              <a:spcBef>
-                <a:spcPts val="0"/>
-              </a:spcBef>
-              <a:spcAft>
-                <a:spcPts val="0"/>
-              </a:spcAft>
-            </a:pPr>
-            <a:r>
-              <a:rPr sz="1050" b="1" i="0" spc="220">
-                <a:solidFill>
-                  <a:srgbClr val="8C8984"/>
-                </a:solidFill>
-                <a:latin typeface="Arial"/>
-                <a:cs typeface="Arial"/>
-              </a:rPr>
-              <a:t>ФИНАНСЫ</a:t>
-            </a:r>
-          </a:p>
-        </p:txBody>
-      </p:sp>
-      <p:sp>
-        <p:nvSpPr>
-          <p:cNvPr id="4" name="TextBox 3"/>
           <p:cNvSpPr txBox="1"/>
           <p:nvPr/>
         </p:nvSpPr>
@@ -3731,7 +3639,7 @@
       </p:sp>
       <p:sp>
         <p:nvSpPr>
-          <p:cNvPr id="5" name="TextBox 4"/>
+          <p:cNvPr id="4" name="TextBox 3"/>
           <p:cNvSpPr txBox="1"/>
           <p:nvPr/>
         </p:nvSpPr>
@@ -3777,7 +3685,7 @@
       </p:sp>
       <p:sp>
         <p:nvSpPr>
-          <p:cNvPr id="6" name="Rectangle 5"/>
+          <p:cNvPr id="5" name="Rectangle 4"/>
           <p:cNvSpPr/>
           <p:nvPr/>
         </p:nvSpPr>
@@ -3821,7 +3729,7 @@
       </p:sp>
       <p:graphicFrame>
         <p:nvGraphicFramePr>
-          <p:cNvPr id="7" name="Table 6"/>
+          <p:cNvPr id="6" name="Table 5"/>
           <p:cNvGraphicFramePr>
             <a:graphicFrameLocks noGrp="1"/>
           </p:cNvGraphicFramePr>
@@ -4419,7 +4327,7 @@
       </p:graphicFrame>
       <p:sp>
         <p:nvSpPr>
-          <p:cNvPr id="8" name="TextBox 7"/>
+          <p:cNvPr id="7" name="TextBox 6"/>
           <p:cNvSpPr txBox="1"/>
           <p:nvPr/>
         </p:nvSpPr>
@@ -4475,14 +4383,14 @@
       </p:sp>
       <p:sp>
         <p:nvSpPr>
-          <p:cNvPr id="9" name="TextBox 8"/>
+          <p:cNvPr id="8" name="TextBox 7"/>
           <p:cNvSpPr txBox="1"/>
           <p:nvPr/>
         </p:nvSpPr>
         <p:spPr>
           <a:xfrm>
-            <a:off x="10362895" y="6400800"/>
-            <a:ext cx="1417320" cy="320040"/>
+            <a:off x="9814255" y="6291072"/>
+            <a:ext cx="1965960" cy="411480"/>
           </a:xfrm>
           <a:prstGeom prst="rect">
             <a:avLst/>
@@ -4507,7 +4415,7 @@
               </a:spcAft>
             </a:pPr>
             <a:r>
-              <a:rPr sz="1000" b="1" i="0" spc="160">
+              <a:rPr sz="1350" b="1" i="0" spc="140">
                 <a:solidFill>
                   <a:srgbClr val="8C8984"/>
                 </a:solidFill>
@@ -4553,8 +4461,8 @@
         </p:nvSpPr>
         <p:spPr>
           <a:xfrm>
-            <a:off x="502920" y="292608"/>
-            <a:ext cx="7315200" cy="365760"/>
+            <a:off x="5287975" y="310896"/>
+            <a:ext cx="6400800" cy="457200"/>
           </a:xfrm>
           <a:prstGeom prst="rect">
             <a:avLst/>
@@ -4567,7 +4475,7 @@
           </a:bodyPr>
           <a:lstStyle/>
           <a:p>
-            <a:pPr algn="l">
+            <a:pPr algn="r">
               <a:lnSpc>
                 <a:spcPct val="100000"/>
               </a:lnSpc>
@@ -4579,14 +4487,14 @@
               </a:spcAft>
             </a:pPr>
             <a:r>
-              <a:rPr sz="1050" b="1" i="0" spc="220">
+              <a:rPr sz="1500" b="1" i="0" spc="180">
                 <a:solidFill>
                   <a:srgbClr val="8C8984"/>
                 </a:solidFill>
                 <a:latin typeface="Arial"/>
                 <a:cs typeface="Arial"/>
               </a:rPr>
-              <a:t>ИС «ТРОПА» · ЗАЩИТА ВКР</a:t>
+              <a:t>ИНТЕГРАЦИЯ</a:t>
             </a:r>
           </a:p>
         </p:txBody>
@@ -4594,52 +4502,6 @@
       <p:sp>
         <p:nvSpPr>
           <p:cNvPr id="3" name="TextBox 2"/>
-          <p:cNvSpPr txBox="1"/>
-          <p:nvPr/>
-        </p:nvSpPr>
-        <p:spPr>
-          <a:xfrm>
-            <a:off x="6202375" y="292608"/>
-            <a:ext cx="5486400" cy="365760"/>
-          </a:xfrm>
-          <a:prstGeom prst="rect">
-            <a:avLst/>
-          </a:prstGeom>
-          <a:noFill/>
-        </p:spPr>
-        <p:txBody>
-          <a:bodyPr wrap="square" lIns="0" rIns="0" tIns="0" bIns="0">
-            <a:noAutofit/>
-          </a:bodyPr>
-          <a:lstStyle/>
-          <a:p>
-            <a:pPr algn="r">
-              <a:lnSpc>
-                <a:spcPct val="100000"/>
-              </a:lnSpc>
-              <a:spcBef>
-                <a:spcPts val="0"/>
-              </a:spcBef>
-              <a:spcAft>
-                <a:spcPts val="0"/>
-              </a:spcAft>
-            </a:pPr>
-            <a:r>
-              <a:rPr sz="1050" b="1" i="0" spc="220">
-                <a:solidFill>
-                  <a:srgbClr val="8C8984"/>
-                </a:solidFill>
-                <a:latin typeface="Arial"/>
-                <a:cs typeface="Arial"/>
-              </a:rPr>
-              <a:t>ИНТЕГРАЦИЯ</a:t>
-            </a:r>
-          </a:p>
-        </p:txBody>
-      </p:sp>
-      <p:sp>
-        <p:nvSpPr>
-          <p:cNvPr id="4" name="TextBox 3"/>
           <p:cNvSpPr txBox="1"/>
           <p:nvPr/>
         </p:nvSpPr>
@@ -4708,7 +4570,7 @@
       </p:sp>
       <p:sp>
         <p:nvSpPr>
-          <p:cNvPr id="5" name="TextBox 4"/>
+          <p:cNvPr id="4" name="TextBox 3"/>
           <p:cNvSpPr txBox="1"/>
           <p:nvPr/>
         </p:nvSpPr>
@@ -4754,7 +4616,7 @@
       </p:sp>
       <p:sp>
         <p:nvSpPr>
-          <p:cNvPr id="6" name="Rectangle 5"/>
+          <p:cNvPr id="5" name="Rectangle 4"/>
           <p:cNvSpPr/>
           <p:nvPr/>
         </p:nvSpPr>
@@ -4798,7 +4660,7 @@
       </p:sp>
       <p:sp>
         <p:nvSpPr>
-          <p:cNvPr id="7" name="TextBox 6"/>
+          <p:cNvPr id="6" name="TextBox 5"/>
           <p:cNvSpPr txBox="1"/>
           <p:nvPr/>
         </p:nvSpPr>
@@ -5016,7 +4878,7 @@
       </p:sp>
       <p:sp>
         <p:nvSpPr>
-          <p:cNvPr id="8" name="TextBox 7"/>
+          <p:cNvPr id="7" name="TextBox 6"/>
           <p:cNvSpPr txBox="1"/>
           <p:nvPr/>
         </p:nvSpPr>
@@ -5141,14 +5003,14 @@
       </p:sp>
       <p:sp>
         <p:nvSpPr>
-          <p:cNvPr id="9" name="TextBox 8"/>
+          <p:cNvPr id="8" name="TextBox 7"/>
           <p:cNvSpPr txBox="1"/>
           <p:nvPr/>
         </p:nvSpPr>
         <p:spPr>
           <a:xfrm>
-            <a:off x="10362895" y="6400800"/>
-            <a:ext cx="1417320" cy="320040"/>
+            <a:off x="9814255" y="6291072"/>
+            <a:ext cx="1965960" cy="411480"/>
           </a:xfrm>
           <a:prstGeom prst="rect">
             <a:avLst/>
@@ -5173,7 +5035,7 @@
               </a:spcAft>
             </a:pPr>
             <a:r>
-              <a:rPr sz="1000" b="1" i="0" spc="160">
+              <a:rPr sz="1350" b="1" i="0" spc="140">
                 <a:solidFill>
                   <a:srgbClr val="8C8984"/>
                 </a:solidFill>
@@ -5219,8 +5081,8 @@
         </p:nvSpPr>
         <p:spPr>
           <a:xfrm>
-            <a:off x="502920" y="292608"/>
-            <a:ext cx="7315200" cy="365760"/>
+            <a:off x="5287975" y="310896"/>
+            <a:ext cx="6400800" cy="457200"/>
           </a:xfrm>
           <a:prstGeom prst="rect">
             <a:avLst/>
@@ -5233,7 +5095,7 @@
           </a:bodyPr>
           <a:lstStyle/>
           <a:p>
-            <a:pPr algn="l">
+            <a:pPr algn="r">
               <a:lnSpc>
                 <a:spcPct val="100000"/>
               </a:lnSpc>
@@ -5245,14 +5107,14 @@
               </a:spcAft>
             </a:pPr>
             <a:r>
-              <a:rPr sz="1050" b="1" i="0" spc="220">
+              <a:rPr sz="1500" b="1" i="0" spc="180">
                 <a:solidFill>
                   <a:srgbClr val="8C8984"/>
                 </a:solidFill>
                 <a:latin typeface="Arial"/>
                 <a:cs typeface="Arial"/>
               </a:rPr>
-              <a:t>ИС «ТРОПА» · ЗАЩИТА ВКР</a:t>
+              <a:t>БЕЗОПАСНОСТЬ</a:t>
             </a:r>
           </a:p>
         </p:txBody>
@@ -5260,52 +5122,6 @@
       <p:sp>
         <p:nvSpPr>
           <p:cNvPr id="3" name="TextBox 2"/>
-          <p:cNvSpPr txBox="1"/>
-          <p:nvPr/>
-        </p:nvSpPr>
-        <p:spPr>
-          <a:xfrm>
-            <a:off x="6202375" y="292608"/>
-            <a:ext cx="5486400" cy="365760"/>
-          </a:xfrm>
-          <a:prstGeom prst="rect">
-            <a:avLst/>
-          </a:prstGeom>
-          <a:noFill/>
-        </p:spPr>
-        <p:txBody>
-          <a:bodyPr wrap="square" lIns="0" rIns="0" tIns="0" bIns="0">
-            <a:noAutofit/>
-          </a:bodyPr>
-          <a:lstStyle/>
-          <a:p>
-            <a:pPr algn="r">
-              <a:lnSpc>
-                <a:spcPct val="100000"/>
-              </a:lnSpc>
-              <a:spcBef>
-                <a:spcPts val="0"/>
-              </a:spcBef>
-              <a:spcAft>
-                <a:spcPts val="0"/>
-              </a:spcAft>
-            </a:pPr>
-            <a:r>
-              <a:rPr sz="1050" b="1" i="0" spc="220">
-                <a:solidFill>
-                  <a:srgbClr val="8C8984"/>
-                </a:solidFill>
-                <a:latin typeface="Arial"/>
-                <a:cs typeface="Arial"/>
-              </a:rPr>
-              <a:t>БЕЗОПАСНОСТЬ</a:t>
-            </a:r>
-          </a:p>
-        </p:txBody>
-      </p:sp>
-      <p:sp>
-        <p:nvSpPr>
-          <p:cNvPr id="4" name="TextBox 3"/>
           <p:cNvSpPr txBox="1"/>
           <p:nvPr/>
         </p:nvSpPr>
@@ -5351,7 +5167,7 @@
       </p:sp>
       <p:sp>
         <p:nvSpPr>
-          <p:cNvPr id="5" name="TextBox 4"/>
+          <p:cNvPr id="4" name="TextBox 3"/>
           <p:cNvSpPr txBox="1"/>
           <p:nvPr/>
         </p:nvSpPr>
@@ -5397,7 +5213,7 @@
       </p:sp>
       <p:sp>
         <p:nvSpPr>
-          <p:cNvPr id="6" name="Rectangle 5"/>
+          <p:cNvPr id="5" name="Rectangle 4"/>
           <p:cNvSpPr/>
           <p:nvPr/>
         </p:nvSpPr>
@@ -5441,7 +5257,7 @@
       </p:sp>
       <p:sp>
         <p:nvSpPr>
-          <p:cNvPr id="7" name="TextBox 6"/>
+          <p:cNvPr id="6" name="TextBox 5"/>
           <p:cNvSpPr txBox="1"/>
           <p:nvPr/>
         </p:nvSpPr>
@@ -5616,7 +5432,7 @@
       </p:sp>
       <p:sp>
         <p:nvSpPr>
-          <p:cNvPr id="8" name="TextBox 7"/>
+          <p:cNvPr id="7" name="TextBox 6"/>
           <p:cNvSpPr txBox="1"/>
           <p:nvPr/>
         </p:nvSpPr>
@@ -5784,14 +5600,14 @@
       </p:sp>
       <p:sp>
         <p:nvSpPr>
-          <p:cNvPr id="9" name="TextBox 8"/>
+          <p:cNvPr id="8" name="TextBox 7"/>
           <p:cNvSpPr txBox="1"/>
           <p:nvPr/>
         </p:nvSpPr>
         <p:spPr>
           <a:xfrm>
-            <a:off x="10362895" y="6400800"/>
-            <a:ext cx="1417320" cy="320040"/>
+            <a:off x="9814255" y="6291072"/>
+            <a:ext cx="1965960" cy="411480"/>
           </a:xfrm>
           <a:prstGeom prst="rect">
             <a:avLst/>
@@ -5816,7 +5632,7 @@
               </a:spcAft>
             </a:pPr>
             <a:r>
-              <a:rPr sz="1000" b="1" i="0" spc="160">
+              <a:rPr sz="1350" b="1" i="0" spc="140">
                 <a:solidFill>
                   <a:srgbClr val="8C8984"/>
                 </a:solidFill>
@@ -5862,8 +5678,8 @@
         </p:nvSpPr>
         <p:spPr>
           <a:xfrm>
-            <a:off x="502920" y="292608"/>
-            <a:ext cx="7315200" cy="365760"/>
+            <a:off x="5287975" y="310896"/>
+            <a:ext cx="6400800" cy="457200"/>
           </a:xfrm>
           <a:prstGeom prst="rect">
             <a:avLst/>
@@ -5876,7 +5692,7 @@
           </a:bodyPr>
           <a:lstStyle/>
           <a:p>
-            <a:pPr algn="l">
+            <a:pPr algn="r">
               <a:lnSpc>
                 <a:spcPct val="100000"/>
               </a:lnSpc>
@@ -5888,14 +5704,14 @@
               </a:spcAft>
             </a:pPr>
             <a:r>
-              <a:rPr sz="1050" b="1" i="0" spc="220">
+              <a:rPr sz="1500" b="1" i="0" spc="180">
                 <a:solidFill>
                   <a:srgbClr val="8C8984"/>
                 </a:solidFill>
                 <a:latin typeface="Arial"/>
                 <a:cs typeface="Arial"/>
               </a:rPr>
-              <a:t>ИС «ТРОПА» · ЗАЩИТА ВКР</a:t>
+              <a:t>РЕЗУЛЬТАТЫ</a:t>
             </a:r>
           </a:p>
         </p:txBody>
@@ -5903,52 +5719,6 @@
       <p:sp>
         <p:nvSpPr>
           <p:cNvPr id="3" name="TextBox 2"/>
-          <p:cNvSpPr txBox="1"/>
-          <p:nvPr/>
-        </p:nvSpPr>
-        <p:spPr>
-          <a:xfrm>
-            <a:off x="6202375" y="292608"/>
-            <a:ext cx="5486400" cy="365760"/>
-          </a:xfrm>
-          <a:prstGeom prst="rect">
-            <a:avLst/>
-          </a:prstGeom>
-          <a:noFill/>
-        </p:spPr>
-        <p:txBody>
-          <a:bodyPr wrap="square" lIns="0" rIns="0" tIns="0" bIns="0">
-            <a:noAutofit/>
-          </a:bodyPr>
-          <a:lstStyle/>
-          <a:p>
-            <a:pPr algn="r">
-              <a:lnSpc>
-                <a:spcPct val="100000"/>
-              </a:lnSpc>
-              <a:spcBef>
-                <a:spcPts val="0"/>
-              </a:spcBef>
-              <a:spcAft>
-                <a:spcPts val="0"/>
-              </a:spcAft>
-            </a:pPr>
-            <a:r>
-              <a:rPr sz="1050" b="1" i="0" spc="220">
-                <a:solidFill>
-                  <a:srgbClr val="8C8984"/>
-                </a:solidFill>
-                <a:latin typeface="Arial"/>
-                <a:cs typeface="Arial"/>
-              </a:rPr>
-              <a:t>РЕЗУЛЬТАТЫ</a:t>
-            </a:r>
-          </a:p>
-        </p:txBody>
-      </p:sp>
-      <p:sp>
-        <p:nvSpPr>
-          <p:cNvPr id="4" name="TextBox 3"/>
           <p:cNvSpPr txBox="1"/>
           <p:nvPr/>
         </p:nvSpPr>
@@ -5994,7 +5764,7 @@
       </p:sp>
       <p:sp>
         <p:nvSpPr>
-          <p:cNvPr id="5" name="TextBox 4"/>
+          <p:cNvPr id="4" name="TextBox 3"/>
           <p:cNvSpPr txBox="1"/>
           <p:nvPr/>
         </p:nvSpPr>
@@ -6040,7 +5810,7 @@
       </p:sp>
       <p:sp>
         <p:nvSpPr>
-          <p:cNvPr id="6" name="Rectangle 5"/>
+          <p:cNvPr id="5" name="Rectangle 4"/>
           <p:cNvSpPr/>
           <p:nvPr/>
         </p:nvSpPr>
@@ -6084,7 +5854,7 @@
       </p:sp>
       <p:sp>
         <p:nvSpPr>
-          <p:cNvPr id="7" name="TextBox 6"/>
+          <p:cNvPr id="6" name="TextBox 5"/>
           <p:cNvSpPr txBox="1"/>
           <p:nvPr/>
         </p:nvSpPr>
@@ -6302,7 +6072,7 @@
       </p:sp>
       <p:sp>
         <p:nvSpPr>
-          <p:cNvPr id="8" name="TextBox 7"/>
+          <p:cNvPr id="7" name="TextBox 6"/>
           <p:cNvSpPr txBox="1"/>
           <p:nvPr/>
         </p:nvSpPr>
@@ -6480,14 +6250,14 @@
       </p:sp>
       <p:sp>
         <p:nvSpPr>
-          <p:cNvPr id="9" name="TextBox 8"/>
+          <p:cNvPr id="8" name="TextBox 7"/>
           <p:cNvSpPr txBox="1"/>
           <p:nvPr/>
         </p:nvSpPr>
         <p:spPr>
           <a:xfrm>
-            <a:off x="10362895" y="6400800"/>
-            <a:ext cx="1417320" cy="320040"/>
+            <a:off x="9814255" y="6291072"/>
+            <a:ext cx="1965960" cy="411480"/>
           </a:xfrm>
           <a:prstGeom prst="rect">
             <a:avLst/>
@@ -6512,7 +6282,7 @@
               </a:spcAft>
             </a:pPr>
             <a:r>
-              <a:rPr sz="1000" b="1" i="0" spc="160">
+              <a:rPr sz="1350" b="1" i="0" spc="140">
                 <a:solidFill>
                   <a:srgbClr val="8C8984"/>
                 </a:solidFill>
@@ -6558,8 +6328,8 @@
         </p:nvSpPr>
         <p:spPr>
           <a:xfrm>
-            <a:off x="502920" y="292608"/>
-            <a:ext cx="7315200" cy="365760"/>
+            <a:off x="5287975" y="310896"/>
+            <a:ext cx="6400800" cy="457200"/>
           </a:xfrm>
           <a:prstGeom prst="rect">
             <a:avLst/>
@@ -6572,7 +6342,7 @@
           </a:bodyPr>
           <a:lstStyle/>
           <a:p>
-            <a:pPr algn="l">
+            <a:pPr algn="r">
               <a:lnSpc>
                 <a:spcPct val="100000"/>
               </a:lnSpc>
@@ -6584,14 +6354,14 @@
               </a:spcAft>
             </a:pPr>
             <a:r>
-              <a:rPr sz="1050" b="1" i="0" spc="220">
+              <a:rPr sz="1500" b="1" i="0" spc="180">
                 <a:solidFill>
                   <a:srgbClr val="8C8984"/>
                 </a:solidFill>
                 <a:latin typeface="Arial"/>
                 <a:cs typeface="Arial"/>
               </a:rPr>
-              <a:t>ИС «ТРОПА» · ЗАЩИТА ВКР</a:t>
+              <a:t>ЭКОНОМИКА</a:t>
             </a:r>
           </a:p>
         </p:txBody>
@@ -6599,52 +6369,6 @@
       <p:sp>
         <p:nvSpPr>
           <p:cNvPr id="3" name="TextBox 2"/>
-          <p:cNvSpPr txBox="1"/>
-          <p:nvPr/>
-        </p:nvSpPr>
-        <p:spPr>
-          <a:xfrm>
-            <a:off x="6202375" y="292608"/>
-            <a:ext cx="5486400" cy="365760"/>
-          </a:xfrm>
-          <a:prstGeom prst="rect">
-            <a:avLst/>
-          </a:prstGeom>
-          <a:noFill/>
-        </p:spPr>
-        <p:txBody>
-          <a:bodyPr wrap="square" lIns="0" rIns="0" tIns="0" bIns="0">
-            <a:noAutofit/>
-          </a:bodyPr>
-          <a:lstStyle/>
-          <a:p>
-            <a:pPr algn="r">
-              <a:lnSpc>
-                <a:spcPct val="100000"/>
-              </a:lnSpc>
-              <a:spcBef>
-                <a:spcPts val="0"/>
-              </a:spcBef>
-              <a:spcAft>
-                <a:spcPts val="0"/>
-              </a:spcAft>
-            </a:pPr>
-            <a:r>
-              <a:rPr sz="1050" b="1" i="0" spc="220">
-                <a:solidFill>
-                  <a:srgbClr val="8C8984"/>
-                </a:solidFill>
-                <a:latin typeface="Arial"/>
-                <a:cs typeface="Arial"/>
-              </a:rPr>
-              <a:t>ЭКОНОМИКА</a:t>
-            </a:r>
-          </a:p>
-        </p:txBody>
-      </p:sp>
-      <p:sp>
-        <p:nvSpPr>
-          <p:cNvPr id="4" name="TextBox 3"/>
           <p:cNvSpPr txBox="1"/>
           <p:nvPr/>
         </p:nvSpPr>
@@ -6690,7 +6414,7 @@
       </p:sp>
       <p:sp>
         <p:nvSpPr>
-          <p:cNvPr id="5" name="TextBox 4"/>
+          <p:cNvPr id="4" name="TextBox 3"/>
           <p:cNvSpPr txBox="1"/>
           <p:nvPr/>
         </p:nvSpPr>
@@ -6736,7 +6460,7 @@
       </p:sp>
       <p:sp>
         <p:nvSpPr>
-          <p:cNvPr id="6" name="Rectangle 5"/>
+          <p:cNvPr id="5" name="Rectangle 4"/>
           <p:cNvSpPr/>
           <p:nvPr/>
         </p:nvSpPr>
@@ -6780,7 +6504,7 @@
       </p:sp>
       <p:sp>
         <p:nvSpPr>
-          <p:cNvPr id="7" name="TextBox 6"/>
+          <p:cNvPr id="6" name="TextBox 5"/>
           <p:cNvSpPr txBox="1"/>
           <p:nvPr/>
         </p:nvSpPr>
@@ -6849,7 +6573,7 @@
       </p:sp>
       <p:sp>
         <p:nvSpPr>
-          <p:cNvPr id="8" name="TextBox 7"/>
+          <p:cNvPr id="7" name="TextBox 6"/>
           <p:cNvSpPr txBox="1"/>
           <p:nvPr/>
         </p:nvSpPr>
@@ -6918,7 +6642,7 @@
       </p:sp>
       <p:sp>
         <p:nvSpPr>
-          <p:cNvPr id="9" name="TextBox 8"/>
+          <p:cNvPr id="8" name="TextBox 7"/>
           <p:cNvSpPr txBox="1"/>
           <p:nvPr/>
         </p:nvSpPr>
@@ -7010,7 +6734,7 @@
       </p:sp>
       <p:sp>
         <p:nvSpPr>
-          <p:cNvPr id="10" name="TextBox 9"/>
+          <p:cNvPr id="9" name="TextBox 8"/>
           <p:cNvSpPr txBox="1"/>
           <p:nvPr/>
         </p:nvSpPr>
@@ -7185,14 +6909,14 @@
       </p:sp>
       <p:sp>
         <p:nvSpPr>
-          <p:cNvPr id="11" name="TextBox 10"/>
+          <p:cNvPr id="10" name="TextBox 9"/>
           <p:cNvSpPr txBox="1"/>
           <p:nvPr/>
         </p:nvSpPr>
         <p:spPr>
           <a:xfrm>
-            <a:off x="10362895" y="6400800"/>
-            <a:ext cx="1417320" cy="320040"/>
+            <a:off x="9814255" y="6291072"/>
+            <a:ext cx="1965960" cy="411480"/>
           </a:xfrm>
           <a:prstGeom prst="rect">
             <a:avLst/>
@@ -7217,7 +6941,7 @@
               </a:spcAft>
             </a:pPr>
             <a:r>
-              <a:rPr sz="1000" b="1" i="0" spc="160">
+              <a:rPr sz="1350" b="1" i="0" spc="140">
                 <a:solidFill>
                   <a:srgbClr val="8C8984"/>
                 </a:solidFill>
@@ -7263,8 +6987,8 @@
         </p:nvSpPr>
         <p:spPr>
           <a:xfrm>
-            <a:off x="502920" y="292608"/>
-            <a:ext cx="7315200" cy="365760"/>
+            <a:off x="5287975" y="310896"/>
+            <a:ext cx="6400800" cy="457200"/>
           </a:xfrm>
           <a:prstGeom prst="rect">
             <a:avLst/>
@@ -7277,7 +7001,7 @@
           </a:bodyPr>
           <a:lstStyle/>
           <a:p>
-            <a:pPr algn="l">
+            <a:pPr algn="r">
               <a:lnSpc>
                 <a:spcPct val="100000"/>
               </a:lnSpc>
@@ -7289,14 +7013,14 @@
               </a:spcAft>
             </a:pPr>
             <a:r>
-              <a:rPr sz="1050" b="1" i="0" spc="220">
+              <a:rPr sz="1500" b="1" i="0" spc="180">
                 <a:solidFill>
                   <a:srgbClr val="8C8984"/>
                 </a:solidFill>
                 <a:latin typeface="Arial"/>
                 <a:cs typeface="Arial"/>
               </a:rPr>
-              <a:t>ИС «ТРОПА» · ЗАЩИТА ВКР</a:t>
+              <a:t>ОКУПАЕМОСТЬ</a:t>
             </a:r>
           </a:p>
         </p:txBody>
@@ -7304,52 +7028,6 @@
       <p:sp>
         <p:nvSpPr>
           <p:cNvPr id="3" name="TextBox 2"/>
-          <p:cNvSpPr txBox="1"/>
-          <p:nvPr/>
-        </p:nvSpPr>
-        <p:spPr>
-          <a:xfrm>
-            <a:off x="6202375" y="292608"/>
-            <a:ext cx="5486400" cy="365760"/>
-          </a:xfrm>
-          <a:prstGeom prst="rect">
-            <a:avLst/>
-          </a:prstGeom>
-          <a:noFill/>
-        </p:spPr>
-        <p:txBody>
-          <a:bodyPr wrap="square" lIns="0" rIns="0" tIns="0" bIns="0">
-            <a:noAutofit/>
-          </a:bodyPr>
-          <a:lstStyle/>
-          <a:p>
-            <a:pPr algn="r">
-              <a:lnSpc>
-                <a:spcPct val="100000"/>
-              </a:lnSpc>
-              <a:spcBef>
-                <a:spcPts val="0"/>
-              </a:spcBef>
-              <a:spcAft>
-                <a:spcPts val="0"/>
-              </a:spcAft>
-            </a:pPr>
-            <a:r>
-              <a:rPr sz="1050" b="1" i="0" spc="220">
-                <a:solidFill>
-                  <a:srgbClr val="8C8984"/>
-                </a:solidFill>
-                <a:latin typeface="Arial"/>
-                <a:cs typeface="Arial"/>
-              </a:rPr>
-              <a:t>ОКУПАЕМОСТЬ</a:t>
-            </a:r>
-          </a:p>
-        </p:txBody>
-      </p:sp>
-      <p:sp>
-        <p:nvSpPr>
-          <p:cNvPr id="4" name="TextBox 3"/>
           <p:cNvSpPr txBox="1"/>
           <p:nvPr/>
         </p:nvSpPr>
@@ -7395,7 +7073,7 @@
       </p:sp>
       <p:sp>
         <p:nvSpPr>
-          <p:cNvPr id="5" name="TextBox 4"/>
+          <p:cNvPr id="4" name="TextBox 3"/>
           <p:cNvSpPr txBox="1"/>
           <p:nvPr/>
         </p:nvSpPr>
@@ -7441,7 +7119,7 @@
       </p:sp>
       <p:sp>
         <p:nvSpPr>
-          <p:cNvPr id="6" name="Rectangle 5"/>
+          <p:cNvPr id="5" name="Rectangle 4"/>
           <p:cNvSpPr/>
           <p:nvPr/>
         </p:nvSpPr>
@@ -7485,7 +7163,7 @@
       </p:sp>
       <p:sp>
         <p:nvSpPr>
-          <p:cNvPr id="7" name="TextBox 6"/>
+          <p:cNvPr id="6" name="TextBox 5"/>
           <p:cNvSpPr txBox="1"/>
           <p:nvPr/>
         </p:nvSpPr>
@@ -7577,7 +7255,7 @@
       </p:sp>
       <p:sp>
         <p:nvSpPr>
-          <p:cNvPr id="8" name="TextBox 7"/>
+          <p:cNvPr id="7" name="TextBox 6"/>
           <p:cNvSpPr txBox="1"/>
           <p:nvPr/>
         </p:nvSpPr>
@@ -7669,7 +7347,7 @@
       </p:sp>
       <p:sp>
         <p:nvSpPr>
-          <p:cNvPr id="9" name="TextBox 8"/>
+          <p:cNvPr id="8" name="TextBox 7"/>
           <p:cNvSpPr txBox="1"/>
           <p:nvPr/>
         </p:nvSpPr>
@@ -7761,7 +7439,7 @@
       </p:sp>
       <p:sp>
         <p:nvSpPr>
-          <p:cNvPr id="10" name="TextBox 9"/>
+          <p:cNvPr id="9" name="TextBox 8"/>
           <p:cNvSpPr txBox="1"/>
           <p:nvPr/>
         </p:nvSpPr>
@@ -7903,14 +7581,14 @@
       </p:sp>
       <p:sp>
         <p:nvSpPr>
-          <p:cNvPr id="11" name="TextBox 10"/>
+          <p:cNvPr id="10" name="TextBox 9"/>
           <p:cNvSpPr txBox="1"/>
           <p:nvPr/>
         </p:nvSpPr>
         <p:spPr>
           <a:xfrm>
-            <a:off x="10362895" y="6400800"/>
-            <a:ext cx="1417320" cy="320040"/>
+            <a:off x="9814255" y="6291072"/>
+            <a:ext cx="1965960" cy="411480"/>
           </a:xfrm>
           <a:prstGeom prst="rect">
             <a:avLst/>
@@ -7935,7 +7613,7 @@
               </a:spcAft>
             </a:pPr>
             <a:r>
-              <a:rPr sz="1000" b="1" i="0" spc="160">
+              <a:rPr sz="1350" b="1" i="0" spc="140">
                 <a:solidFill>
                   <a:srgbClr val="8C8984"/>
                 </a:solidFill>
@@ -7981,8 +7659,8 @@
         </p:nvSpPr>
         <p:spPr>
           <a:xfrm>
-            <a:off x="502920" y="292608"/>
-            <a:ext cx="7315200" cy="365760"/>
+            <a:off x="5287975" y="310896"/>
+            <a:ext cx="6400800" cy="457200"/>
           </a:xfrm>
           <a:prstGeom prst="rect">
             <a:avLst/>
@@ -7995,7 +7673,7 @@
           </a:bodyPr>
           <a:lstStyle/>
           <a:p>
-            <a:pPr algn="l">
+            <a:pPr algn="r">
               <a:lnSpc>
                 <a:spcPct val="100000"/>
               </a:lnSpc>
@@ -8007,14 +7685,14 @@
               </a:spcAft>
             </a:pPr>
             <a:r>
-              <a:rPr sz="1050" b="1" i="0" spc="220">
+              <a:rPr sz="1500" b="1" i="0" spc="180">
                 <a:solidFill>
                   <a:srgbClr val="8C8984"/>
                 </a:solidFill>
                 <a:latin typeface="Arial"/>
                 <a:cs typeface="Arial"/>
               </a:rPr>
-              <a:t>ИС «ТРОПА» · ЗАЩИТА ВКР</a:t>
+              <a:t>ЗАКЛЮЧЕНИЕ</a:t>
             </a:r>
           </a:p>
         </p:txBody>
@@ -8022,52 +7700,6 @@
       <p:sp>
         <p:nvSpPr>
           <p:cNvPr id="3" name="TextBox 2"/>
-          <p:cNvSpPr txBox="1"/>
-          <p:nvPr/>
-        </p:nvSpPr>
-        <p:spPr>
-          <a:xfrm>
-            <a:off x="6202375" y="292608"/>
-            <a:ext cx="5486400" cy="365760"/>
-          </a:xfrm>
-          <a:prstGeom prst="rect">
-            <a:avLst/>
-          </a:prstGeom>
-          <a:noFill/>
-        </p:spPr>
-        <p:txBody>
-          <a:bodyPr wrap="square" lIns="0" rIns="0" tIns="0" bIns="0">
-            <a:noAutofit/>
-          </a:bodyPr>
-          <a:lstStyle/>
-          <a:p>
-            <a:pPr algn="r">
-              <a:lnSpc>
-                <a:spcPct val="100000"/>
-              </a:lnSpc>
-              <a:spcBef>
-                <a:spcPts val="0"/>
-              </a:spcBef>
-              <a:spcAft>
-                <a:spcPts val="0"/>
-              </a:spcAft>
-            </a:pPr>
-            <a:r>
-              <a:rPr sz="1050" b="1" i="0" spc="220">
-                <a:solidFill>
-                  <a:srgbClr val="8C8984"/>
-                </a:solidFill>
-                <a:latin typeface="Arial"/>
-                <a:cs typeface="Arial"/>
-              </a:rPr>
-              <a:t>ЗАКЛЮЧЕНИЕ</a:t>
-            </a:r>
-          </a:p>
-        </p:txBody>
-      </p:sp>
-      <p:sp>
-        <p:nvSpPr>
-          <p:cNvPr id="4" name="TextBox 3"/>
           <p:cNvSpPr txBox="1"/>
           <p:nvPr/>
         </p:nvSpPr>
@@ -8113,7 +7745,7 @@
       </p:sp>
       <p:sp>
         <p:nvSpPr>
-          <p:cNvPr id="5" name="TextBox 4"/>
+          <p:cNvPr id="4" name="TextBox 3"/>
           <p:cNvSpPr txBox="1"/>
           <p:nvPr/>
         </p:nvSpPr>
@@ -8159,7 +7791,7 @@
       </p:sp>
       <p:sp>
         <p:nvSpPr>
-          <p:cNvPr id="6" name="Rectangle 5"/>
+          <p:cNvPr id="5" name="Rectangle 4"/>
           <p:cNvSpPr/>
           <p:nvPr/>
         </p:nvSpPr>
@@ -8203,7 +7835,7 @@
       </p:sp>
       <p:sp>
         <p:nvSpPr>
-          <p:cNvPr id="7" name="TextBox 6"/>
+          <p:cNvPr id="6" name="TextBox 5"/>
           <p:cNvSpPr txBox="1"/>
           <p:nvPr/>
         </p:nvSpPr>
@@ -8394,7 +8026,7 @@
       </p:sp>
       <p:sp>
         <p:nvSpPr>
-          <p:cNvPr id="8" name="TextBox 7"/>
+          <p:cNvPr id="7" name="TextBox 6"/>
           <p:cNvSpPr txBox="1"/>
           <p:nvPr/>
         </p:nvSpPr>
@@ -8539,14 +8171,14 @@
       </p:sp>
       <p:sp>
         <p:nvSpPr>
-          <p:cNvPr id="9" name="TextBox 8"/>
+          <p:cNvPr id="8" name="TextBox 7"/>
           <p:cNvSpPr txBox="1"/>
           <p:nvPr/>
         </p:nvSpPr>
         <p:spPr>
           <a:xfrm>
-            <a:off x="10362895" y="6400800"/>
-            <a:ext cx="1417320" cy="320040"/>
+            <a:off x="9814255" y="6291072"/>
+            <a:ext cx="1965960" cy="411480"/>
           </a:xfrm>
           <a:prstGeom prst="rect">
             <a:avLst/>
@@ -8571,7 +8203,7 @@
               </a:spcAft>
             </a:pPr>
             <a:r>
-              <a:rPr sz="1000" b="1" i="0" spc="160">
+              <a:rPr sz="1350" b="1" i="0" spc="140">
                 <a:solidFill>
                   <a:srgbClr val="8C8984"/>
                 </a:solidFill>
@@ -8617,8 +8249,8 @@
         </p:nvSpPr>
         <p:spPr>
           <a:xfrm>
-            <a:off x="502920" y="292608"/>
-            <a:ext cx="7315200" cy="365760"/>
+            <a:off x="5287975" y="310896"/>
+            <a:ext cx="6400800" cy="457200"/>
           </a:xfrm>
           <a:prstGeom prst="rect">
             <a:avLst/>
@@ -8631,7 +8263,7 @@
           </a:bodyPr>
           <a:lstStyle/>
           <a:p>
-            <a:pPr algn="l">
+            <a:pPr algn="r">
               <a:lnSpc>
                 <a:spcPct val="100000"/>
               </a:lnSpc>
@@ -8643,59 +8275,13 @@
               </a:spcAft>
             </a:pPr>
             <a:r>
-              <a:rPr sz="1050" b="1" i="0" spc="220">
+              <a:rPr sz="1500" b="1" i="0" spc="180">
                 <a:solidFill>
                   <a:srgbClr val="8C8984"/>
                 </a:solidFill>
                 <a:latin typeface="Arial"/>
                 <a:cs typeface="Arial"/>
               </a:rPr>
-              <a:t>ИС «ТРОПА» · ЗАЩИТА ВКР</a:t>
-            </a:r>
-          </a:p>
-        </p:txBody>
-      </p:sp>
-      <p:sp>
-        <p:nvSpPr>
-          <p:cNvPr id="3" name="TextBox 2"/>
-          <p:cNvSpPr txBox="1"/>
-          <p:nvPr/>
-        </p:nvSpPr>
-        <p:spPr>
-          <a:xfrm>
-            <a:off x="6202375" y="292608"/>
-            <a:ext cx="5486400" cy="365760"/>
-          </a:xfrm>
-          <a:prstGeom prst="rect">
-            <a:avLst/>
-          </a:prstGeom>
-          <a:noFill/>
-        </p:spPr>
-        <p:txBody>
-          <a:bodyPr wrap="square" lIns="0" rIns="0" tIns="0" bIns="0">
-            <a:noAutofit/>
-          </a:bodyPr>
-          <a:lstStyle/>
-          <a:p>
-            <a:pPr algn="r">
-              <a:lnSpc>
-                <a:spcPct val="100000"/>
-              </a:lnSpc>
-              <a:spcBef>
-                <a:spcPts val="0"/>
-              </a:spcBef>
-              <a:spcAft>
-                <a:spcPts val="0"/>
-              </a:spcAft>
-            </a:pPr>
-            <a:r>
-              <a:rPr sz="1050" b="1" i="0" spc="220">
-                <a:solidFill>
-                  <a:srgbClr val="8C8984"/>
-                </a:solidFill>
-                <a:latin typeface="Arial"/>
-                <a:cs typeface="Arial"/>
-              </a:rPr>
               <a:t>ТУЛГУ · 2026</a:t>
             </a:r>
           </a:p>
@@ -8703,7 +8289,7 @@
       </p:sp>
       <p:sp>
         <p:nvSpPr>
-          <p:cNvPr id="4" name="Rectangle 3"/>
+          <p:cNvPr id="3" name="Rectangle 2"/>
           <p:cNvSpPr/>
           <p:nvPr/>
         </p:nvSpPr>
@@ -8747,7 +8333,7 @@
       </p:sp>
       <p:sp>
         <p:nvSpPr>
-          <p:cNvPr id="5" name="TextBox 4"/>
+          <p:cNvPr id="4" name="TextBox 3"/>
           <p:cNvSpPr txBox="1"/>
           <p:nvPr/>
         </p:nvSpPr>
@@ -8793,7 +8379,7 @@
       </p:sp>
       <p:sp>
         <p:nvSpPr>
-          <p:cNvPr id="6" name="TextBox 5"/>
+          <p:cNvPr id="5" name="TextBox 4"/>
           <p:cNvSpPr txBox="1"/>
           <p:nvPr/>
         </p:nvSpPr>
@@ -8839,7 +8425,7 @@
       </p:sp>
       <p:sp>
         <p:nvSpPr>
-          <p:cNvPr id="7" name="TextBox 6"/>
+          <p:cNvPr id="6" name="TextBox 5"/>
           <p:cNvSpPr txBox="1"/>
           <p:nvPr/>
         </p:nvSpPr>
@@ -8940,8 +8526,8 @@
         </p:nvSpPr>
         <p:spPr>
           <a:xfrm>
-            <a:off x="502920" y="292608"/>
-            <a:ext cx="7315200" cy="365760"/>
+            <a:off x="5287975" y="310896"/>
+            <a:ext cx="6400800" cy="457200"/>
           </a:xfrm>
           <a:prstGeom prst="rect">
             <a:avLst/>
@@ -8954,7 +8540,7 @@
           </a:bodyPr>
           <a:lstStyle/>
           <a:p>
-            <a:pPr algn="l">
+            <a:pPr algn="r">
               <a:lnSpc>
                 <a:spcPct val="100000"/>
               </a:lnSpc>
@@ -8966,14 +8552,14 @@
               </a:spcAft>
             </a:pPr>
             <a:r>
-              <a:rPr sz="1050" b="1" i="0" spc="220">
+              <a:rPr sz="1500" b="1" i="0" spc="180">
                 <a:solidFill>
                   <a:srgbClr val="8C8984"/>
                 </a:solidFill>
                 <a:latin typeface="Arial"/>
                 <a:cs typeface="Arial"/>
               </a:rPr>
-              <a:t>ИС «ТРОПА» · ЗАЩИТА ВКР</a:t>
+              <a:t>О РАБОТЕ</a:t>
             </a:r>
           </a:p>
         </p:txBody>
@@ -8981,52 +8567,6 @@
       <p:sp>
         <p:nvSpPr>
           <p:cNvPr id="3" name="TextBox 2"/>
-          <p:cNvSpPr txBox="1"/>
-          <p:nvPr/>
-        </p:nvSpPr>
-        <p:spPr>
-          <a:xfrm>
-            <a:off x="6202375" y="292608"/>
-            <a:ext cx="5486400" cy="365760"/>
-          </a:xfrm>
-          <a:prstGeom prst="rect">
-            <a:avLst/>
-          </a:prstGeom>
-          <a:noFill/>
-        </p:spPr>
-        <p:txBody>
-          <a:bodyPr wrap="square" lIns="0" rIns="0" tIns="0" bIns="0">
-            <a:noAutofit/>
-          </a:bodyPr>
-          <a:lstStyle/>
-          <a:p>
-            <a:pPr algn="r">
-              <a:lnSpc>
-                <a:spcPct val="100000"/>
-              </a:lnSpc>
-              <a:spcBef>
-                <a:spcPts val="0"/>
-              </a:spcBef>
-              <a:spcAft>
-                <a:spcPts val="0"/>
-              </a:spcAft>
-            </a:pPr>
-            <a:r>
-              <a:rPr sz="1050" b="1" i="0" spc="220">
-                <a:solidFill>
-                  <a:srgbClr val="8C8984"/>
-                </a:solidFill>
-                <a:latin typeface="Arial"/>
-                <a:cs typeface="Arial"/>
-              </a:rPr>
-              <a:t>О РАБОТЕ</a:t>
-            </a:r>
-          </a:p>
-        </p:txBody>
-      </p:sp>
-      <p:sp>
-        <p:nvSpPr>
-          <p:cNvPr id="4" name="TextBox 3"/>
           <p:cNvSpPr txBox="1"/>
           <p:nvPr/>
         </p:nvSpPr>
@@ -9072,7 +8612,7 @@
       </p:sp>
       <p:sp>
         <p:nvSpPr>
-          <p:cNvPr id="5" name="TextBox 4"/>
+          <p:cNvPr id="4" name="TextBox 3"/>
           <p:cNvSpPr txBox="1"/>
           <p:nvPr/>
         </p:nvSpPr>
@@ -9118,7 +8658,7 @@
       </p:sp>
       <p:sp>
         <p:nvSpPr>
-          <p:cNvPr id="6" name="Rectangle 5"/>
+          <p:cNvPr id="5" name="Rectangle 4"/>
           <p:cNvSpPr/>
           <p:nvPr/>
         </p:nvSpPr>
@@ -9162,7 +8702,7 @@
       </p:sp>
       <p:sp>
         <p:nvSpPr>
-          <p:cNvPr id="7" name="TextBox 6"/>
+          <p:cNvPr id="6" name="TextBox 5"/>
           <p:cNvSpPr txBox="1"/>
           <p:nvPr/>
         </p:nvSpPr>
@@ -9323,7 +8863,7 @@
       </p:sp>
       <p:sp>
         <p:nvSpPr>
-          <p:cNvPr id="8" name="TextBox 7"/>
+          <p:cNvPr id="7" name="TextBox 6"/>
           <p:cNvSpPr txBox="1"/>
           <p:nvPr/>
         </p:nvSpPr>
@@ -9600,14 +9140,14 @@
       </p:sp>
       <p:sp>
         <p:nvSpPr>
-          <p:cNvPr id="9" name="TextBox 8"/>
+          <p:cNvPr id="8" name="TextBox 7"/>
           <p:cNvSpPr txBox="1"/>
           <p:nvPr/>
         </p:nvSpPr>
         <p:spPr>
           <a:xfrm>
-            <a:off x="10362895" y="6400800"/>
-            <a:ext cx="1417320" cy="320040"/>
+            <a:off x="9814255" y="6291072"/>
+            <a:ext cx="1965960" cy="411480"/>
           </a:xfrm>
           <a:prstGeom prst="rect">
             <a:avLst/>
@@ -9632,7 +9172,7 @@
               </a:spcAft>
             </a:pPr>
             <a:r>
-              <a:rPr sz="1000" b="1" i="0" spc="160">
+              <a:rPr sz="1350" b="1" i="0" spc="140">
                 <a:solidFill>
                   <a:srgbClr val="8C8984"/>
                 </a:solidFill>
@@ -9678,8 +9218,8 @@
         </p:nvSpPr>
         <p:spPr>
           <a:xfrm>
-            <a:off x="502920" y="292608"/>
-            <a:ext cx="7315200" cy="365760"/>
+            <a:off x="5287975" y="310896"/>
+            <a:ext cx="6400800" cy="457200"/>
           </a:xfrm>
           <a:prstGeom prst="rect">
             <a:avLst/>
@@ -9692,7 +9232,7 @@
           </a:bodyPr>
           <a:lstStyle/>
           <a:p>
-            <a:pPr algn="l">
+            <a:pPr algn="r">
               <a:lnSpc>
                 <a:spcPct val="100000"/>
               </a:lnSpc>
@@ -9704,14 +9244,14 @@
               </a:spcAft>
             </a:pPr>
             <a:r>
-              <a:rPr sz="1050" b="1" i="0" spc="220">
+              <a:rPr sz="1500" b="1" i="0" spc="180">
                 <a:solidFill>
                   <a:srgbClr val="8C8984"/>
                 </a:solidFill>
                 <a:latin typeface="Arial"/>
                 <a:cs typeface="Arial"/>
               </a:rPr>
-              <a:t>ИС «ТРОПА» · ЗАЩИТА ВКР</a:t>
+              <a:t>АКТУАЛЬНОСТЬ</a:t>
             </a:r>
           </a:p>
         </p:txBody>
@@ -9719,52 +9259,6 @@
       <p:sp>
         <p:nvSpPr>
           <p:cNvPr id="3" name="TextBox 2"/>
-          <p:cNvSpPr txBox="1"/>
-          <p:nvPr/>
-        </p:nvSpPr>
-        <p:spPr>
-          <a:xfrm>
-            <a:off x="6202375" y="292608"/>
-            <a:ext cx="5486400" cy="365760"/>
-          </a:xfrm>
-          <a:prstGeom prst="rect">
-            <a:avLst/>
-          </a:prstGeom>
-          <a:noFill/>
-        </p:spPr>
-        <p:txBody>
-          <a:bodyPr wrap="square" lIns="0" rIns="0" tIns="0" bIns="0">
-            <a:noAutofit/>
-          </a:bodyPr>
-          <a:lstStyle/>
-          <a:p>
-            <a:pPr algn="r">
-              <a:lnSpc>
-                <a:spcPct val="100000"/>
-              </a:lnSpc>
-              <a:spcBef>
-                <a:spcPts val="0"/>
-              </a:spcBef>
-              <a:spcAft>
-                <a:spcPts val="0"/>
-              </a:spcAft>
-            </a:pPr>
-            <a:r>
-              <a:rPr sz="1050" b="1" i="0" spc="220">
-                <a:solidFill>
-                  <a:srgbClr val="8C8984"/>
-                </a:solidFill>
-                <a:latin typeface="Arial"/>
-                <a:cs typeface="Arial"/>
-              </a:rPr>
-              <a:t>АКТУАЛЬНОСТЬ</a:t>
-            </a:r>
-          </a:p>
-        </p:txBody>
-      </p:sp>
-      <p:sp>
-        <p:nvSpPr>
-          <p:cNvPr id="4" name="TextBox 3"/>
           <p:cNvSpPr txBox="1"/>
           <p:nvPr/>
         </p:nvSpPr>
@@ -9810,7 +9304,7 @@
       </p:sp>
       <p:sp>
         <p:nvSpPr>
-          <p:cNvPr id="5" name="TextBox 4"/>
+          <p:cNvPr id="4" name="TextBox 3"/>
           <p:cNvSpPr txBox="1"/>
           <p:nvPr/>
         </p:nvSpPr>
@@ -9856,7 +9350,7 @@
       </p:sp>
       <p:sp>
         <p:nvSpPr>
-          <p:cNvPr id="6" name="Rectangle 5"/>
+          <p:cNvPr id="5" name="Rectangle 4"/>
           <p:cNvSpPr/>
           <p:nvPr/>
         </p:nvSpPr>
@@ -9900,7 +9394,7 @@
       </p:sp>
       <p:sp>
         <p:nvSpPr>
-          <p:cNvPr id="7" name="TextBox 6"/>
+          <p:cNvPr id="6" name="TextBox 5"/>
           <p:cNvSpPr txBox="1"/>
           <p:nvPr/>
         </p:nvSpPr>
@@ -9992,7 +9486,7 @@
       </p:sp>
       <p:sp>
         <p:nvSpPr>
-          <p:cNvPr id="8" name="TextBox 7"/>
+          <p:cNvPr id="7" name="TextBox 6"/>
           <p:cNvSpPr txBox="1"/>
           <p:nvPr/>
         </p:nvSpPr>
@@ -10084,7 +9578,7 @@
       </p:sp>
       <p:sp>
         <p:nvSpPr>
-          <p:cNvPr id="9" name="TextBox 8"/>
+          <p:cNvPr id="8" name="TextBox 7"/>
           <p:cNvSpPr txBox="1"/>
           <p:nvPr/>
         </p:nvSpPr>
@@ -10176,7 +9670,7 @@
       </p:sp>
       <p:sp>
         <p:nvSpPr>
-          <p:cNvPr id="10" name="TextBox 9"/>
+          <p:cNvPr id="9" name="TextBox 8"/>
           <p:cNvSpPr txBox="1"/>
           <p:nvPr/>
         </p:nvSpPr>
@@ -10321,7 +9815,7 @@
       </p:sp>
       <p:sp>
         <p:nvSpPr>
-          <p:cNvPr id="11" name="TextBox 10"/>
+          <p:cNvPr id="10" name="TextBox 9"/>
           <p:cNvSpPr txBox="1"/>
           <p:nvPr/>
         </p:nvSpPr>
@@ -10400,14 +9894,14 @@
       </p:sp>
       <p:sp>
         <p:nvSpPr>
-          <p:cNvPr id="12" name="TextBox 11"/>
+          <p:cNvPr id="11" name="TextBox 10"/>
           <p:cNvSpPr txBox="1"/>
           <p:nvPr/>
         </p:nvSpPr>
         <p:spPr>
           <a:xfrm>
-            <a:off x="10362895" y="6400800"/>
-            <a:ext cx="1417320" cy="320040"/>
+            <a:off x="9814255" y="6291072"/>
+            <a:ext cx="1965960" cy="411480"/>
           </a:xfrm>
           <a:prstGeom prst="rect">
             <a:avLst/>
@@ -10432,7 +9926,7 @@
               </a:spcAft>
             </a:pPr>
             <a:r>
-              <a:rPr sz="1000" b="1" i="0" spc="160">
+              <a:rPr sz="1350" b="1" i="0" spc="140">
                 <a:solidFill>
                   <a:srgbClr val="8C8984"/>
                 </a:solidFill>
@@ -10478,8 +9972,8 @@
         </p:nvSpPr>
         <p:spPr>
           <a:xfrm>
-            <a:off x="502920" y="292608"/>
-            <a:ext cx="7315200" cy="365760"/>
+            <a:off x="5287975" y="310896"/>
+            <a:ext cx="6400800" cy="457200"/>
           </a:xfrm>
           <a:prstGeom prst="rect">
             <a:avLst/>
@@ -10492,7 +9986,7 @@
           </a:bodyPr>
           <a:lstStyle/>
           <a:p>
-            <a:pPr algn="l">
+            <a:pPr algn="r">
               <a:lnSpc>
                 <a:spcPct val="100000"/>
               </a:lnSpc>
@@ -10504,14 +9998,14 @@
               </a:spcAft>
             </a:pPr>
             <a:r>
-              <a:rPr sz="1050" b="1" i="0" spc="220">
+              <a:rPr sz="1500" b="1" i="0" spc="180">
                 <a:solidFill>
                   <a:srgbClr val="8C8984"/>
                 </a:solidFill>
                 <a:latin typeface="Arial"/>
                 <a:cs typeface="Arial"/>
               </a:rPr>
-              <a:t>ИС «ТРОПА» · ЗАЩИТА ВКР</a:t>
+              <a:t>АНАЛИЗ</a:t>
             </a:r>
           </a:p>
         </p:txBody>
@@ -10519,52 +10013,6 @@
       <p:sp>
         <p:nvSpPr>
           <p:cNvPr id="3" name="TextBox 2"/>
-          <p:cNvSpPr txBox="1"/>
-          <p:nvPr/>
-        </p:nvSpPr>
-        <p:spPr>
-          <a:xfrm>
-            <a:off x="6202375" y="292608"/>
-            <a:ext cx="5486400" cy="365760"/>
-          </a:xfrm>
-          <a:prstGeom prst="rect">
-            <a:avLst/>
-          </a:prstGeom>
-          <a:noFill/>
-        </p:spPr>
-        <p:txBody>
-          <a:bodyPr wrap="square" lIns="0" rIns="0" tIns="0" bIns="0">
-            <a:noAutofit/>
-          </a:bodyPr>
-          <a:lstStyle/>
-          <a:p>
-            <a:pPr algn="r">
-              <a:lnSpc>
-                <a:spcPct val="100000"/>
-              </a:lnSpc>
-              <a:spcBef>
-                <a:spcPts val="0"/>
-              </a:spcBef>
-              <a:spcAft>
-                <a:spcPts val="0"/>
-              </a:spcAft>
-            </a:pPr>
-            <a:r>
-              <a:rPr sz="1050" b="1" i="0" spc="220">
-                <a:solidFill>
-                  <a:srgbClr val="8C8984"/>
-                </a:solidFill>
-                <a:latin typeface="Arial"/>
-                <a:cs typeface="Arial"/>
-              </a:rPr>
-              <a:t>АНАЛИЗ</a:t>
-            </a:r>
-          </a:p>
-        </p:txBody>
-      </p:sp>
-      <p:sp>
-        <p:nvSpPr>
-          <p:cNvPr id="4" name="TextBox 3"/>
           <p:cNvSpPr txBox="1"/>
           <p:nvPr/>
         </p:nvSpPr>
@@ -10610,7 +10058,7 @@
       </p:sp>
       <p:sp>
         <p:nvSpPr>
-          <p:cNvPr id="5" name="TextBox 4"/>
+          <p:cNvPr id="4" name="TextBox 3"/>
           <p:cNvSpPr txBox="1"/>
           <p:nvPr/>
         </p:nvSpPr>
@@ -10656,7 +10104,7 @@
       </p:sp>
       <p:sp>
         <p:nvSpPr>
-          <p:cNvPr id="6" name="Rectangle 5"/>
+          <p:cNvPr id="5" name="Rectangle 4"/>
           <p:cNvSpPr/>
           <p:nvPr/>
         </p:nvSpPr>
@@ -10700,7 +10148,7 @@
       </p:sp>
       <p:graphicFrame>
         <p:nvGraphicFramePr>
-          <p:cNvPr id="7" name="Table 6"/>
+          <p:cNvPr id="6" name="Table 5"/>
           <p:cNvGraphicFramePr>
             <a:graphicFrameLocks noGrp="1"/>
           </p:cNvGraphicFramePr>
@@ -11932,14 +11380,14 @@
       </p:graphicFrame>
       <p:sp>
         <p:nvSpPr>
-          <p:cNvPr id="8" name="TextBox 7"/>
+          <p:cNvPr id="7" name="TextBox 6"/>
           <p:cNvSpPr txBox="1"/>
           <p:nvPr/>
         </p:nvSpPr>
         <p:spPr>
           <a:xfrm>
-            <a:off x="10362895" y="6400800"/>
-            <a:ext cx="1417320" cy="320040"/>
+            <a:off x="9814255" y="6291072"/>
+            <a:ext cx="1965960" cy="411480"/>
           </a:xfrm>
           <a:prstGeom prst="rect">
             <a:avLst/>
@@ -11964,7 +11412,7 @@
               </a:spcAft>
             </a:pPr>
             <a:r>
-              <a:rPr sz="1000" b="1" i="0" spc="160">
+              <a:rPr sz="1350" b="1" i="0" spc="140">
                 <a:solidFill>
                   <a:srgbClr val="8C8984"/>
                 </a:solidFill>
@@ -12010,8 +11458,8 @@
         </p:nvSpPr>
         <p:spPr>
           <a:xfrm>
-            <a:off x="502920" y="292608"/>
-            <a:ext cx="7315200" cy="365760"/>
+            <a:off x="5287975" y="310896"/>
+            <a:ext cx="6400800" cy="457200"/>
           </a:xfrm>
           <a:prstGeom prst="rect">
             <a:avLst/>
@@ -12024,7 +11472,7 @@
           </a:bodyPr>
           <a:lstStyle/>
           <a:p>
-            <a:pPr algn="l">
+            <a:pPr algn="r">
               <a:lnSpc>
                 <a:spcPct val="100000"/>
               </a:lnSpc>
@@ -12036,14 +11484,14 @@
               </a:spcAft>
             </a:pPr>
             <a:r>
-              <a:rPr sz="1050" b="1" i="0" spc="220">
+              <a:rPr sz="1500" b="1" i="0" spc="180">
                 <a:solidFill>
                   <a:srgbClr val="8C8984"/>
                 </a:solidFill>
                 <a:latin typeface="Arial"/>
                 <a:cs typeface="Arial"/>
               </a:rPr>
-              <a:t>ИС «ТРОПА» · ЗАЩИТА ВКР</a:t>
+              <a:t>СТРУКТУРА</a:t>
             </a:r>
           </a:p>
         </p:txBody>
@@ -12051,52 +11499,6 @@
       <p:sp>
         <p:nvSpPr>
           <p:cNvPr id="3" name="TextBox 2"/>
-          <p:cNvSpPr txBox="1"/>
-          <p:nvPr/>
-        </p:nvSpPr>
-        <p:spPr>
-          <a:xfrm>
-            <a:off x="6202375" y="292608"/>
-            <a:ext cx="5486400" cy="365760"/>
-          </a:xfrm>
-          <a:prstGeom prst="rect">
-            <a:avLst/>
-          </a:prstGeom>
-          <a:noFill/>
-        </p:spPr>
-        <p:txBody>
-          <a:bodyPr wrap="square" lIns="0" rIns="0" tIns="0" bIns="0">
-            <a:noAutofit/>
-          </a:bodyPr>
-          <a:lstStyle/>
-          <a:p>
-            <a:pPr algn="r">
-              <a:lnSpc>
-                <a:spcPct val="100000"/>
-              </a:lnSpc>
-              <a:spcBef>
-                <a:spcPts val="0"/>
-              </a:spcBef>
-              <a:spcAft>
-                <a:spcPts val="0"/>
-              </a:spcAft>
-            </a:pPr>
-            <a:r>
-              <a:rPr sz="1050" b="1" i="0" spc="220">
-                <a:solidFill>
-                  <a:srgbClr val="8C8984"/>
-                </a:solidFill>
-                <a:latin typeface="Arial"/>
-                <a:cs typeface="Arial"/>
-              </a:rPr>
-              <a:t>СТРУКТУРА</a:t>
-            </a:r>
-          </a:p>
-        </p:txBody>
-      </p:sp>
-      <p:sp>
-        <p:nvSpPr>
-          <p:cNvPr id="4" name="TextBox 3"/>
           <p:cNvSpPr txBox="1"/>
           <p:nvPr/>
         </p:nvSpPr>
@@ -12142,7 +11544,7 @@
       </p:sp>
       <p:sp>
         <p:nvSpPr>
-          <p:cNvPr id="5" name="TextBox 4"/>
+          <p:cNvPr id="4" name="TextBox 3"/>
           <p:cNvSpPr txBox="1"/>
           <p:nvPr/>
         </p:nvSpPr>
@@ -12188,7 +11590,7 @@
       </p:sp>
       <p:sp>
         <p:nvSpPr>
-          <p:cNvPr id="6" name="Rectangle 5"/>
+          <p:cNvPr id="5" name="Rectangle 4"/>
           <p:cNvSpPr/>
           <p:nvPr/>
         </p:nvSpPr>
@@ -12232,7 +11634,7 @@
       </p:sp>
       <p:sp>
         <p:nvSpPr>
-          <p:cNvPr id="7" name="TextBox 6"/>
+          <p:cNvPr id="6" name="TextBox 5"/>
           <p:cNvSpPr txBox="1"/>
           <p:nvPr/>
         </p:nvSpPr>
@@ -12476,7 +11878,7 @@
       </p:sp>
       <p:sp>
         <p:nvSpPr>
-          <p:cNvPr id="8" name="TextBox 7"/>
+          <p:cNvPr id="7" name="TextBox 6"/>
           <p:cNvSpPr txBox="1"/>
           <p:nvPr/>
         </p:nvSpPr>
@@ -12750,14 +12152,14 @@
       </p:sp>
       <p:sp>
         <p:nvSpPr>
-          <p:cNvPr id="9" name="TextBox 8"/>
+          <p:cNvPr id="8" name="TextBox 7"/>
           <p:cNvSpPr txBox="1"/>
           <p:nvPr/>
         </p:nvSpPr>
         <p:spPr>
           <a:xfrm>
-            <a:off x="10362895" y="6400800"/>
-            <a:ext cx="1417320" cy="320040"/>
+            <a:off x="9814255" y="6291072"/>
+            <a:ext cx="1965960" cy="411480"/>
           </a:xfrm>
           <a:prstGeom prst="rect">
             <a:avLst/>
@@ -12782,7 +12184,7 @@
               </a:spcAft>
             </a:pPr>
             <a:r>
-              <a:rPr sz="1000" b="1" i="0" spc="160">
+              <a:rPr sz="1350" b="1" i="0" spc="140">
                 <a:solidFill>
                   <a:srgbClr val="8C8984"/>
                 </a:solidFill>
@@ -12828,8 +12230,8 @@
         </p:nvSpPr>
         <p:spPr>
           <a:xfrm>
-            <a:off x="502920" y="292608"/>
-            <a:ext cx="7315200" cy="365760"/>
+            <a:off x="5287975" y="310896"/>
+            <a:ext cx="6400800" cy="457200"/>
           </a:xfrm>
           <a:prstGeom prst="rect">
             <a:avLst/>
@@ -12842,7 +12244,7 @@
           </a:bodyPr>
           <a:lstStyle/>
           <a:p>
-            <a:pPr algn="l">
+            <a:pPr algn="r">
               <a:lnSpc>
                 <a:spcPct val="100000"/>
               </a:lnSpc>
@@ -12854,14 +12256,14 @@
               </a:spcAft>
             </a:pPr>
             <a:r>
-              <a:rPr sz="1050" b="1" i="0" spc="220">
+              <a:rPr sz="1500" b="1" i="0" spc="180">
                 <a:solidFill>
                   <a:srgbClr val="8C8984"/>
                 </a:solidFill>
                 <a:latin typeface="Arial"/>
                 <a:cs typeface="Arial"/>
               </a:rPr>
-              <a:t>ИС «ТРОПА» · ЗАЩИТА ВКР</a:t>
+              <a:t>ЯДРО</a:t>
             </a:r>
           </a:p>
         </p:txBody>
@@ -12869,52 +12271,6 @@
       <p:sp>
         <p:nvSpPr>
           <p:cNvPr id="3" name="TextBox 2"/>
-          <p:cNvSpPr txBox="1"/>
-          <p:nvPr/>
-        </p:nvSpPr>
-        <p:spPr>
-          <a:xfrm>
-            <a:off x="6202375" y="292608"/>
-            <a:ext cx="5486400" cy="365760"/>
-          </a:xfrm>
-          <a:prstGeom prst="rect">
-            <a:avLst/>
-          </a:prstGeom>
-          <a:noFill/>
-        </p:spPr>
-        <p:txBody>
-          <a:bodyPr wrap="square" lIns="0" rIns="0" tIns="0" bIns="0">
-            <a:noAutofit/>
-          </a:bodyPr>
-          <a:lstStyle/>
-          <a:p>
-            <a:pPr algn="r">
-              <a:lnSpc>
-                <a:spcPct val="100000"/>
-              </a:lnSpc>
-              <a:spcBef>
-                <a:spcPts val="0"/>
-              </a:spcBef>
-              <a:spcAft>
-                <a:spcPts val="0"/>
-              </a:spcAft>
-            </a:pPr>
-            <a:r>
-              <a:rPr sz="1050" b="1" i="0" spc="220">
-                <a:solidFill>
-                  <a:srgbClr val="8C8984"/>
-                </a:solidFill>
-                <a:latin typeface="Arial"/>
-                <a:cs typeface="Arial"/>
-              </a:rPr>
-              <a:t>ЯДРО</a:t>
-            </a:r>
-          </a:p>
-        </p:txBody>
-      </p:sp>
-      <p:sp>
-        <p:nvSpPr>
-          <p:cNvPr id="4" name="TextBox 3"/>
           <p:cNvSpPr txBox="1"/>
           <p:nvPr/>
         </p:nvSpPr>
@@ -12983,7 +12339,7 @@
       </p:sp>
       <p:sp>
         <p:nvSpPr>
-          <p:cNvPr id="5" name="TextBox 4"/>
+          <p:cNvPr id="4" name="TextBox 3"/>
           <p:cNvSpPr txBox="1"/>
           <p:nvPr/>
         </p:nvSpPr>
@@ -13029,7 +12385,7 @@
       </p:sp>
       <p:sp>
         <p:nvSpPr>
-          <p:cNvPr id="6" name="Rectangle 5"/>
+          <p:cNvPr id="5" name="Rectangle 4"/>
           <p:cNvSpPr/>
           <p:nvPr/>
         </p:nvSpPr>
@@ -13073,7 +12429,7 @@
       </p:sp>
       <p:sp>
         <p:nvSpPr>
-          <p:cNvPr id="7" name="TextBox 6"/>
+          <p:cNvPr id="6" name="TextBox 5"/>
           <p:cNvSpPr txBox="1"/>
           <p:nvPr/>
         </p:nvSpPr>
@@ -13284,7 +12640,7 @@
       </p:sp>
       <p:sp>
         <p:nvSpPr>
-          <p:cNvPr id="8" name="TextBox 7"/>
+          <p:cNvPr id="7" name="TextBox 6"/>
           <p:cNvSpPr txBox="1"/>
           <p:nvPr/>
         </p:nvSpPr>
@@ -13498,14 +12854,14 @@
       </p:sp>
       <p:sp>
         <p:nvSpPr>
-          <p:cNvPr id="9" name="TextBox 8"/>
+          <p:cNvPr id="8" name="TextBox 7"/>
           <p:cNvSpPr txBox="1"/>
           <p:nvPr/>
         </p:nvSpPr>
         <p:spPr>
           <a:xfrm>
-            <a:off x="10362895" y="6400800"/>
-            <a:ext cx="1417320" cy="320040"/>
+            <a:off x="9814255" y="6291072"/>
+            <a:ext cx="1965960" cy="411480"/>
           </a:xfrm>
           <a:prstGeom prst="rect">
             <a:avLst/>
@@ -13530,7 +12886,7 @@
               </a:spcAft>
             </a:pPr>
             <a:r>
-              <a:rPr sz="1000" b="1" i="0" spc="160">
+              <a:rPr sz="1350" b="1" i="0" spc="140">
                 <a:solidFill>
                   <a:srgbClr val="8C8984"/>
                 </a:solidFill>
@@ -13576,8 +12932,8 @@
         </p:nvSpPr>
         <p:spPr>
           <a:xfrm>
-            <a:off x="502920" y="292608"/>
-            <a:ext cx="7315200" cy="365760"/>
+            <a:off x="5287975" y="310896"/>
+            <a:ext cx="6400800" cy="457200"/>
           </a:xfrm>
           <a:prstGeom prst="rect">
             <a:avLst/>
@@ -13590,7 +12946,7 @@
           </a:bodyPr>
           <a:lstStyle/>
           <a:p>
-            <a:pPr algn="l">
+            <a:pPr algn="r">
               <a:lnSpc>
                 <a:spcPct val="100000"/>
               </a:lnSpc>
@@ -13602,14 +12958,14 @@
               </a:spcAft>
             </a:pPr>
             <a:r>
-              <a:rPr sz="1050" b="1" i="0" spc="220">
+              <a:rPr sz="1500" b="1" i="0" spc="180">
                 <a:solidFill>
                   <a:srgbClr val="8C8984"/>
                 </a:solidFill>
                 <a:latin typeface="Arial"/>
                 <a:cs typeface="Arial"/>
               </a:rPr>
-              <a:t>ИС «ТРОПА» · ЗАЩИТА ВКР</a:t>
+              <a:t>РЕАЛИЗАЦИЯ</a:t>
             </a:r>
           </a:p>
         </p:txBody>
@@ -13617,52 +12973,6 @@
       <p:sp>
         <p:nvSpPr>
           <p:cNvPr id="3" name="TextBox 2"/>
-          <p:cNvSpPr txBox="1"/>
-          <p:nvPr/>
-        </p:nvSpPr>
-        <p:spPr>
-          <a:xfrm>
-            <a:off x="6202375" y="292608"/>
-            <a:ext cx="5486400" cy="365760"/>
-          </a:xfrm>
-          <a:prstGeom prst="rect">
-            <a:avLst/>
-          </a:prstGeom>
-          <a:noFill/>
-        </p:spPr>
-        <p:txBody>
-          <a:bodyPr wrap="square" lIns="0" rIns="0" tIns="0" bIns="0">
-            <a:noAutofit/>
-          </a:bodyPr>
-          <a:lstStyle/>
-          <a:p>
-            <a:pPr algn="r">
-              <a:lnSpc>
-                <a:spcPct val="100000"/>
-              </a:lnSpc>
-              <a:spcBef>
-                <a:spcPts val="0"/>
-              </a:spcBef>
-              <a:spcAft>
-                <a:spcPts val="0"/>
-              </a:spcAft>
-            </a:pPr>
-            <a:r>
-              <a:rPr sz="1050" b="1" i="0" spc="220">
-                <a:solidFill>
-                  <a:srgbClr val="8C8984"/>
-                </a:solidFill>
-                <a:latin typeface="Arial"/>
-                <a:cs typeface="Arial"/>
-              </a:rPr>
-              <a:t>РЕАЛИЗАЦИЯ</a:t>
-            </a:r>
-          </a:p>
-        </p:txBody>
-      </p:sp>
-      <p:sp>
-        <p:nvSpPr>
-          <p:cNvPr id="4" name="TextBox 3"/>
           <p:cNvSpPr txBox="1"/>
           <p:nvPr/>
         </p:nvSpPr>
@@ -13708,7 +13018,7 @@
       </p:sp>
       <p:sp>
         <p:nvSpPr>
-          <p:cNvPr id="5" name="TextBox 4"/>
+          <p:cNvPr id="4" name="TextBox 3"/>
           <p:cNvSpPr txBox="1"/>
           <p:nvPr/>
         </p:nvSpPr>
@@ -13754,7 +13064,7 @@
       </p:sp>
       <p:sp>
         <p:nvSpPr>
-          <p:cNvPr id="6" name="Rectangle 5"/>
+          <p:cNvPr id="5" name="Rectangle 4"/>
           <p:cNvSpPr/>
           <p:nvPr/>
         </p:nvSpPr>
@@ -13798,7 +13108,7 @@
       </p:sp>
       <p:sp>
         <p:nvSpPr>
-          <p:cNvPr id="7" name="TextBox 6"/>
+          <p:cNvPr id="6" name="TextBox 5"/>
           <p:cNvSpPr txBox="1"/>
           <p:nvPr/>
         </p:nvSpPr>
@@ -14019,7 +13329,7 @@
       </p:sp>
       <p:sp>
         <p:nvSpPr>
-          <p:cNvPr id="8" name="TextBox 7"/>
+          <p:cNvPr id="7" name="TextBox 6"/>
           <p:cNvSpPr txBox="1"/>
           <p:nvPr/>
         </p:nvSpPr>
@@ -14187,14 +13497,14 @@
       </p:sp>
       <p:sp>
         <p:nvSpPr>
-          <p:cNvPr id="9" name="TextBox 8"/>
+          <p:cNvPr id="8" name="TextBox 7"/>
           <p:cNvSpPr txBox="1"/>
           <p:nvPr/>
         </p:nvSpPr>
         <p:spPr>
           <a:xfrm>
-            <a:off x="10362895" y="6400800"/>
-            <a:ext cx="1417320" cy="320040"/>
+            <a:off x="9814255" y="6291072"/>
+            <a:ext cx="1965960" cy="411480"/>
           </a:xfrm>
           <a:prstGeom prst="rect">
             <a:avLst/>
@@ -14219,7 +13529,7 @@
               </a:spcAft>
             </a:pPr>
             <a:r>
-              <a:rPr sz="1000" b="1" i="0" spc="160">
+              <a:rPr sz="1350" b="1" i="0" spc="140">
                 <a:solidFill>
                   <a:srgbClr val="8C8984"/>
                 </a:solidFill>
@@ -14265,8 +13575,8 @@
         </p:nvSpPr>
         <p:spPr>
           <a:xfrm>
-            <a:off x="502920" y="292608"/>
-            <a:ext cx="7315200" cy="365760"/>
+            <a:off x="5287975" y="310896"/>
+            <a:ext cx="6400800" cy="457200"/>
           </a:xfrm>
           <a:prstGeom prst="rect">
             <a:avLst/>
@@ -14279,7 +13589,7 @@
           </a:bodyPr>
           <a:lstStyle/>
           <a:p>
-            <a:pPr algn="l">
+            <a:pPr algn="r">
               <a:lnSpc>
                 <a:spcPct val="100000"/>
               </a:lnSpc>
@@ -14291,14 +13601,14 @@
               </a:spcAft>
             </a:pPr>
             <a:r>
-              <a:rPr sz="1050" b="1" i="0" spc="220">
+              <a:rPr sz="1500" b="1" i="0" spc="180">
                 <a:solidFill>
                   <a:srgbClr val="8C8984"/>
                 </a:solidFill>
                 <a:latin typeface="Arial"/>
                 <a:cs typeface="Arial"/>
               </a:rPr>
-              <a:t>ИС «ТРОПА» · ЗАЩИТА ВКР</a:t>
+              <a:t>АУДИТОРИЯ</a:t>
             </a:r>
           </a:p>
         </p:txBody>
@@ -14306,52 +13616,6 @@
       <p:sp>
         <p:nvSpPr>
           <p:cNvPr id="3" name="TextBox 2"/>
-          <p:cNvSpPr txBox="1"/>
-          <p:nvPr/>
-        </p:nvSpPr>
-        <p:spPr>
-          <a:xfrm>
-            <a:off x="6202375" y="292608"/>
-            <a:ext cx="5486400" cy="365760"/>
-          </a:xfrm>
-          <a:prstGeom prst="rect">
-            <a:avLst/>
-          </a:prstGeom>
-          <a:noFill/>
-        </p:spPr>
-        <p:txBody>
-          <a:bodyPr wrap="square" lIns="0" rIns="0" tIns="0" bIns="0">
-            <a:noAutofit/>
-          </a:bodyPr>
-          <a:lstStyle/>
-          <a:p>
-            <a:pPr algn="r">
-              <a:lnSpc>
-                <a:spcPct val="100000"/>
-              </a:lnSpc>
-              <a:spcBef>
-                <a:spcPts val="0"/>
-              </a:spcBef>
-              <a:spcAft>
-                <a:spcPts val="0"/>
-              </a:spcAft>
-            </a:pPr>
-            <a:r>
-              <a:rPr sz="1050" b="1" i="0" spc="220">
-                <a:solidFill>
-                  <a:srgbClr val="8C8984"/>
-                </a:solidFill>
-                <a:latin typeface="Arial"/>
-                <a:cs typeface="Arial"/>
-              </a:rPr>
-              <a:t>АУДИТОРИЯ</a:t>
-            </a:r>
-          </a:p>
-        </p:txBody>
-      </p:sp>
-      <p:sp>
-        <p:nvSpPr>
-          <p:cNvPr id="4" name="TextBox 3"/>
           <p:cNvSpPr txBox="1"/>
           <p:nvPr/>
         </p:nvSpPr>
@@ -14397,7 +13661,7 @@
       </p:sp>
       <p:sp>
         <p:nvSpPr>
-          <p:cNvPr id="5" name="TextBox 4"/>
+          <p:cNvPr id="4" name="TextBox 3"/>
           <p:cNvSpPr txBox="1"/>
           <p:nvPr/>
         </p:nvSpPr>
@@ -14443,7 +13707,7 @@
       </p:sp>
       <p:sp>
         <p:nvSpPr>
-          <p:cNvPr id="6" name="Rectangle 5"/>
+          <p:cNvPr id="5" name="Rectangle 4"/>
           <p:cNvSpPr/>
           <p:nvPr/>
         </p:nvSpPr>
@@ -14487,7 +13751,7 @@
       </p:sp>
       <p:graphicFrame>
         <p:nvGraphicFramePr>
-          <p:cNvPr id="7" name="Table 6"/>
+          <p:cNvPr id="6" name="Table 5"/>
           <p:cNvGraphicFramePr>
             <a:graphicFrameLocks noGrp="1"/>
           </p:cNvGraphicFramePr>
@@ -15122,14 +14386,14 @@
       </p:graphicFrame>
       <p:sp>
         <p:nvSpPr>
-          <p:cNvPr id="8" name="TextBox 7"/>
+          <p:cNvPr id="7" name="TextBox 6"/>
           <p:cNvSpPr txBox="1"/>
           <p:nvPr/>
         </p:nvSpPr>
         <p:spPr>
           <a:xfrm>
-            <a:off x="10362895" y="6400800"/>
-            <a:ext cx="1417320" cy="320040"/>
+            <a:off x="9814255" y="6291072"/>
+            <a:ext cx="1965960" cy="411480"/>
           </a:xfrm>
           <a:prstGeom prst="rect">
             <a:avLst/>
@@ -15154,7 +14418,7 @@
               </a:spcAft>
             </a:pPr>
             <a:r>
-              <a:rPr sz="1000" b="1" i="0" spc="160">
+              <a:rPr sz="1350" b="1" i="0" spc="140">
                 <a:solidFill>
                   <a:srgbClr val="8C8984"/>
                 </a:solidFill>
@@ -15200,8 +14464,8 @@
         </p:nvSpPr>
         <p:spPr>
           <a:xfrm>
-            <a:off x="502920" y="292608"/>
-            <a:ext cx="7315200" cy="365760"/>
+            <a:off x="5287975" y="310896"/>
+            <a:ext cx="6400800" cy="457200"/>
           </a:xfrm>
           <a:prstGeom prst="rect">
             <a:avLst/>
@@ -15214,7 +14478,7 @@
           </a:bodyPr>
           <a:lstStyle/>
           <a:p>
-            <a:pPr algn="l">
+            <a:pPr algn="r">
               <a:lnSpc>
                 <a:spcPct val="100000"/>
               </a:lnSpc>
@@ -15226,14 +14490,14 @@
               </a:spcAft>
             </a:pPr>
             <a:r>
-              <a:rPr sz="1050" b="1" i="0" spc="220">
+              <a:rPr sz="1500" b="1" i="0" spc="180">
                 <a:solidFill>
                   <a:srgbClr val="8C8984"/>
                 </a:solidFill>
                 <a:latin typeface="Arial"/>
                 <a:cs typeface="Arial"/>
               </a:rPr>
-              <a:t>ИС «ТРОПА» · ЗАЩИТА ВКР</a:t>
+              <a:t>БИЗНЕС-МОДЕЛЬ</a:t>
             </a:r>
           </a:p>
         </p:txBody>
@@ -15241,52 +14505,6 @@
       <p:sp>
         <p:nvSpPr>
           <p:cNvPr id="3" name="TextBox 2"/>
-          <p:cNvSpPr txBox="1"/>
-          <p:nvPr/>
-        </p:nvSpPr>
-        <p:spPr>
-          <a:xfrm>
-            <a:off x="6202375" y="292608"/>
-            <a:ext cx="5486400" cy="365760"/>
-          </a:xfrm>
-          <a:prstGeom prst="rect">
-            <a:avLst/>
-          </a:prstGeom>
-          <a:noFill/>
-        </p:spPr>
-        <p:txBody>
-          <a:bodyPr wrap="square" lIns="0" rIns="0" tIns="0" bIns="0">
-            <a:noAutofit/>
-          </a:bodyPr>
-          <a:lstStyle/>
-          <a:p>
-            <a:pPr algn="r">
-              <a:lnSpc>
-                <a:spcPct val="100000"/>
-              </a:lnSpc>
-              <a:spcBef>
-                <a:spcPts val="0"/>
-              </a:spcBef>
-              <a:spcAft>
-                <a:spcPts val="0"/>
-              </a:spcAft>
-            </a:pPr>
-            <a:r>
-              <a:rPr sz="1050" b="1" i="0" spc="220">
-                <a:solidFill>
-                  <a:srgbClr val="8C8984"/>
-                </a:solidFill>
-                <a:latin typeface="Arial"/>
-                <a:cs typeface="Arial"/>
-              </a:rPr>
-              <a:t>БИЗНЕС-МОДЕЛЬ</a:t>
-            </a:r>
-          </a:p>
-        </p:txBody>
-      </p:sp>
-      <p:sp>
-        <p:nvSpPr>
-          <p:cNvPr id="4" name="TextBox 3"/>
           <p:cNvSpPr txBox="1"/>
           <p:nvPr/>
         </p:nvSpPr>
@@ -15332,7 +14550,7 @@
       </p:sp>
       <p:sp>
         <p:nvSpPr>
-          <p:cNvPr id="5" name="TextBox 4"/>
+          <p:cNvPr id="4" name="TextBox 3"/>
           <p:cNvSpPr txBox="1"/>
           <p:nvPr/>
         </p:nvSpPr>
@@ -15378,7 +14596,7 @@
       </p:sp>
       <p:sp>
         <p:nvSpPr>
-          <p:cNvPr id="6" name="Rectangle 5"/>
+          <p:cNvPr id="5" name="Rectangle 4"/>
           <p:cNvSpPr/>
           <p:nvPr/>
         </p:nvSpPr>
@@ -15422,7 +14640,7 @@
       </p:sp>
       <p:graphicFrame>
         <p:nvGraphicFramePr>
-          <p:cNvPr id="7" name="Table 6"/>
+          <p:cNvPr id="6" name="Table 5"/>
           <p:cNvGraphicFramePr>
             <a:graphicFrameLocks noGrp="1"/>
           </p:cNvGraphicFramePr>
@@ -15858,14 +15076,14 @@
       </p:graphicFrame>
       <p:sp>
         <p:nvSpPr>
-          <p:cNvPr id="8" name="TextBox 7"/>
+          <p:cNvPr id="7" name="TextBox 6"/>
           <p:cNvSpPr txBox="1"/>
           <p:nvPr/>
         </p:nvSpPr>
         <p:spPr>
           <a:xfrm>
-            <a:off x="10362895" y="6400800"/>
-            <a:ext cx="1417320" cy="320040"/>
+            <a:off x="9814255" y="6291072"/>
+            <a:ext cx="1965960" cy="411480"/>
           </a:xfrm>
           <a:prstGeom prst="rect">
             <a:avLst/>
@@ -15890,7 +15108,7 @@
               </a:spcAft>
             </a:pPr>
             <a:r>
-              <a:rPr sz="1000" b="1" i="0" spc="160">
+              <a:rPr sz="1350" b="1" i="0" spc="140">
                 <a:solidFill>
                   <a:srgbClr val="8C8984"/>
                 </a:solidFill>
